--- a/activity/M02A02/M02A02.pptx
+++ b/activity/M02A02/M02A02.pptx
@@ -1123,7 +1123,7 @@
             <a:fld id="{53CE91DE-ABC6-4D22-89A0-1765B629FB43}" type="datetimeFigureOut">
               <a:rPr lang="es-CO" smtClean="0"/>
               <a:pPr/>
-              <a:t>23/11/2021</a:t>
+              <a:t>29/07/2025</a:t>
             </a:fld>
             <a:endParaRPr lang="es-CO"/>
           </a:p>
@@ -1576,7 +1576,7 @@
             <a:fld id="{43DF08CB-A55A-40B1-AEFD-F19B3CFD19B5}" type="datetimeFigureOut">
               <a:rPr lang="es-CO" smtClean="0"/>
               <a:pPr/>
-              <a:t>23/11/2021</a:t>
+              <a:t>29/07/2025</a:t>
             </a:fld>
             <a:endParaRPr lang="es-CO"/>
           </a:p>
@@ -1743,7 +1743,7 @@
             <a:fld id="{43DF08CB-A55A-40B1-AEFD-F19B3CFD19B5}" type="datetimeFigureOut">
               <a:rPr lang="es-CO" smtClean="0"/>
               <a:pPr/>
-              <a:t>23/11/2021</a:t>
+              <a:t>29/07/2025</a:t>
             </a:fld>
             <a:endParaRPr lang="es-CO"/>
           </a:p>
@@ -1920,7 +1920,7 @@
             <a:fld id="{43DF08CB-A55A-40B1-AEFD-F19B3CFD19B5}" type="datetimeFigureOut">
               <a:rPr lang="es-CO" smtClean="0"/>
               <a:pPr/>
-              <a:t>23/11/2021</a:t>
+              <a:t>29/07/2025</a:t>
             </a:fld>
             <a:endParaRPr lang="es-CO"/>
           </a:p>
@@ -2087,7 +2087,7 @@
             <a:fld id="{43DF08CB-A55A-40B1-AEFD-F19B3CFD19B5}" type="datetimeFigureOut">
               <a:rPr lang="es-CO" smtClean="0"/>
               <a:pPr/>
-              <a:t>23/11/2021</a:t>
+              <a:t>29/07/2025</a:t>
             </a:fld>
             <a:endParaRPr lang="es-CO"/>
           </a:p>
@@ -2330,7 +2330,7 @@
             <a:fld id="{43DF08CB-A55A-40B1-AEFD-F19B3CFD19B5}" type="datetimeFigureOut">
               <a:rPr lang="es-CO" smtClean="0"/>
               <a:pPr/>
-              <a:t>23/11/2021</a:t>
+              <a:t>29/07/2025</a:t>
             </a:fld>
             <a:endParaRPr lang="es-CO"/>
           </a:p>
@@ -2615,7 +2615,7 @@
             <a:fld id="{43DF08CB-A55A-40B1-AEFD-F19B3CFD19B5}" type="datetimeFigureOut">
               <a:rPr lang="es-CO" smtClean="0"/>
               <a:pPr/>
-              <a:t>23/11/2021</a:t>
+              <a:t>29/07/2025</a:t>
             </a:fld>
             <a:endParaRPr lang="es-CO"/>
           </a:p>
@@ -3034,7 +3034,7 @@
             <a:fld id="{43DF08CB-A55A-40B1-AEFD-F19B3CFD19B5}" type="datetimeFigureOut">
               <a:rPr lang="es-CO" smtClean="0"/>
               <a:pPr/>
-              <a:t>23/11/2021</a:t>
+              <a:t>29/07/2025</a:t>
             </a:fld>
             <a:endParaRPr lang="es-CO"/>
           </a:p>
@@ -3149,7 +3149,7 @@
             <a:fld id="{43DF08CB-A55A-40B1-AEFD-F19B3CFD19B5}" type="datetimeFigureOut">
               <a:rPr lang="es-CO" smtClean="0"/>
               <a:pPr/>
-              <a:t>23/11/2021</a:t>
+              <a:t>29/07/2025</a:t>
             </a:fld>
             <a:endParaRPr lang="es-CO"/>
           </a:p>
@@ -3241,7 +3241,7 @@
             <a:fld id="{43DF08CB-A55A-40B1-AEFD-F19B3CFD19B5}" type="datetimeFigureOut">
               <a:rPr lang="es-CO" smtClean="0"/>
               <a:pPr/>
-              <a:t>23/11/2021</a:t>
+              <a:t>29/07/2025</a:t>
             </a:fld>
             <a:endParaRPr lang="es-CO"/>
           </a:p>
@@ -3515,7 +3515,7 @@
             <a:fld id="{43DF08CB-A55A-40B1-AEFD-F19B3CFD19B5}" type="datetimeFigureOut">
               <a:rPr lang="es-CO" smtClean="0"/>
               <a:pPr/>
-              <a:t>23/11/2021</a:t>
+              <a:t>29/07/2025</a:t>
             </a:fld>
             <a:endParaRPr lang="es-CO"/>
           </a:p>
@@ -3765,7 +3765,7 @@
             <a:fld id="{43DF08CB-A55A-40B1-AEFD-F19B3CFD19B5}" type="datetimeFigureOut">
               <a:rPr lang="es-CO" smtClean="0"/>
               <a:pPr/>
-              <a:t>23/11/2021</a:t>
+              <a:t>29/07/2025</a:t>
             </a:fld>
             <a:endParaRPr lang="es-CO"/>
           </a:p>
@@ -3978,7 +3978,7 @@
             <a:fld id="{43DF08CB-A55A-40B1-AEFD-F19B3CFD19B5}" type="datetimeFigureOut">
               <a:rPr lang="es-CO" smtClean="0"/>
               <a:pPr/>
-              <a:t>23/11/2021</a:t>
+              <a:t>29/07/2025</a:t>
             </a:fld>
             <a:endParaRPr lang="es-CO"/>
           </a:p>
@@ -4399,7 +4399,7 @@
                 <a:latin typeface="Segoe UI Light" panose="020B0502040204020203" pitchFamily="34" charset="0"/>
                 <a:cs typeface="Segoe UI Light" panose="020B0502040204020203" pitchFamily="34" charset="0"/>
               </a:rPr>
-              <a:t>v.20200505</a:t>
+              <a:t>v.20250729</a:t>
             </a:r>
             <a:endParaRPr lang="es-CO" sz="800" spc="100" dirty="0">
               <a:latin typeface="Segoe UI Light" panose="020B0502040204020203" pitchFamily="34" charset="0"/>
@@ -5584,21 +5584,7 @@
                 <a:latin typeface="Segoe UI Light" panose="020B0502040204020203" pitchFamily="34" charset="0"/>
                 <a:cs typeface="Segoe UI Light" panose="020B0502040204020203" pitchFamily="34" charset="0"/>
               </a:rPr>
-              <a:t>Autodesk </a:t>
-            </a:r>
-            <a:r>
-              <a:rPr lang="es-CO" sz="1600" dirty="0" err="1">
-                <a:latin typeface="Segoe UI Light" panose="020B0502040204020203" pitchFamily="34" charset="0"/>
-                <a:cs typeface="Segoe UI Light" panose="020B0502040204020203" pitchFamily="34" charset="0"/>
-              </a:rPr>
-              <a:t>Autocad</a:t>
-            </a:r>
-            <a:r>
-              <a:rPr lang="es-CO" sz="1600" dirty="0">
-                <a:latin typeface="Segoe UI Light" panose="020B0502040204020203" pitchFamily="34" charset="0"/>
-                <a:cs typeface="Segoe UI Light" panose="020B0502040204020203" pitchFamily="34" charset="0"/>
-              </a:rPr>
-              <a:t> ®</a:t>
+              <a:t>Autodesk AutoCAD ®</a:t>
             </a:r>
           </a:p>
           <a:p>
@@ -5723,11 +5709,11 @@
               <a:t>Actividad 1: Exportar drenajes naturales de ArcMap a </a:t>
             </a:r>
             <a:r>
-              <a:rPr lang="es-CO" dirty="0" err="1">
+              <a:rPr lang="es-CO" sz="1800" dirty="0">
                 <a:latin typeface="Segoe UI Light" panose="020B0502040204020203" pitchFamily="34" charset="0"/>
                 <a:cs typeface="Segoe UI Light" panose="020B0502040204020203" pitchFamily="34" charset="0"/>
               </a:rPr>
-              <a:t>Autocad</a:t>
+              <a:t>AutoCAD</a:t>
             </a:r>
             <a:endParaRPr lang="es-CO" dirty="0">
               <a:latin typeface="Segoe UI Light" panose="020B0502040204020203" pitchFamily="34" charset="0"/>

--- a/activity/M02A02/M02A02.pptx
+++ b/activity/M02A02/M02A02.pptx
@@ -5706,19 +5706,8 @@
                 <a:latin typeface="Segoe UI Light" panose="020B0502040204020203" pitchFamily="34" charset="0"/>
                 <a:cs typeface="Segoe UI Light" panose="020B0502040204020203" pitchFamily="34" charset="0"/>
               </a:rPr>
-              <a:t>Actividad 1: Exportar drenajes naturales de ArcMap a </a:t>
-            </a:r>
-            <a:r>
-              <a:rPr lang="es-CO" sz="1800" dirty="0">
-                <a:latin typeface="Segoe UI Light" panose="020B0502040204020203" pitchFamily="34" charset="0"/>
-                <a:cs typeface="Segoe UI Light" panose="020B0502040204020203" pitchFamily="34" charset="0"/>
-              </a:rPr>
-              <a:t>AutoCAD</a:t>
-            </a:r>
-            <a:endParaRPr lang="es-CO" dirty="0">
-              <a:latin typeface="Segoe UI Light" panose="020B0502040204020203" pitchFamily="34" charset="0"/>
-              <a:cs typeface="Segoe UI Light" panose="020B0502040204020203" pitchFamily="34" charset="0"/>
-            </a:endParaRPr>
+              <a:t>Actividad 1: Exportar drenajes naturales de ArcMap a AutoCAD</a:t>
+            </a:r>
           </a:p>
         </p:txBody>
       </p:sp>
@@ -5797,7 +5786,7 @@
         <p:spPr>
           <a:xfrm>
             <a:off x="1365164" y="415472"/>
-            <a:ext cx="9589424" cy="1077218"/>
+            <a:ext cx="9589424" cy="830997"/>
           </a:xfrm>
           <a:prstGeom prst="rect">
             <a:avLst/>
@@ -5816,33 +5805,36 @@
                 <a:latin typeface="Segoe UI Light" panose="020B0502040204020203" pitchFamily="34" charset="0"/>
                 <a:cs typeface="Segoe UI Light" panose="020B0502040204020203" pitchFamily="34" charset="0"/>
               </a:rPr>
-              <a:t>Usando ArcGIS® ArcMap, cargue desde la </a:t>
-            </a:r>
-            <a:r>
-              <a:rPr lang="es-CO" sz="1600" dirty="0" err="1">
+              <a:t>Usando ArcGIS® ArcMap o QGIS, cargue la capa de cauce natural </a:t>
+            </a:r>
+            <a:r>
+              <a:rPr lang="es-CO" sz="1600" i="1" dirty="0">
                 <a:latin typeface="Segoe UI Light" panose="020B0502040204020203" pitchFamily="34" charset="0"/>
                 <a:cs typeface="Segoe UI Light" panose="020B0502040204020203" pitchFamily="34" charset="0"/>
               </a:rPr>
-              <a:t>Geodatabase</a:t>
+              <a:t>/file/</a:t>
+            </a:r>
+            <a:r>
+              <a:rPr lang="es-CO" sz="1600" i="1" dirty="0" err="1">
+                <a:latin typeface="Segoe UI Light" panose="020B0502040204020203" pitchFamily="34" charset="0"/>
+                <a:cs typeface="Segoe UI Light" panose="020B0502040204020203" pitchFamily="34" charset="0"/>
+              </a:rPr>
+              <a:t>shp</a:t>
+            </a:r>
+            <a:r>
+              <a:rPr lang="es-CO" sz="1600" i="1" dirty="0">
+                <a:latin typeface="Segoe UI Light" panose="020B0502040204020203" pitchFamily="34" charset="0"/>
+                <a:cs typeface="Segoe UI Light" panose="020B0502040204020203" pitchFamily="34" charset="0"/>
+              </a:rPr>
+              <a:t>/CGG_DrenajeNatural_v0.shp</a:t>
             </a:r>
             <a:r>
               <a:rPr lang="es-CO" sz="1600" dirty="0">
                 <a:latin typeface="Segoe UI Light" panose="020B0502040204020203" pitchFamily="34" charset="0"/>
                 <a:cs typeface="Segoe UI Light" panose="020B0502040204020203" pitchFamily="34" charset="0"/>
               </a:rPr>
-              <a:t> del proyecto la capa de cauce natural “CGG_DrenajeNatural_v0 “ luego expórtela a formato CAD, guardar el archivo con el mismo nombre de la capa de origen, Seleccionar DWG 2007. abra el archivo exportado y péguelo en un archivo en blanco en </a:t>
-            </a:r>
-            <a:r>
-              <a:rPr lang="es-CO" sz="1600" dirty="0" err="1">
-                <a:latin typeface="Segoe UI Light" panose="020B0502040204020203" pitchFamily="34" charset="0"/>
-                <a:cs typeface="Segoe UI Light" panose="020B0502040204020203" pitchFamily="34" charset="0"/>
-              </a:rPr>
-              <a:t>CIVIL3D</a:t>
-            </a:r>
-            <a:endParaRPr lang="es-CO" sz="1600" dirty="0">
-              <a:latin typeface="Segoe UI Light" panose="020B0502040204020203" pitchFamily="34" charset="0"/>
-              <a:cs typeface="Segoe UI Light" panose="020B0502040204020203" pitchFamily="34" charset="0"/>
-            </a:endParaRPr>
+              <a:t>, luego expórtela a formato CAD, guardar el archivo con el mismo nombre de la capa de origen, Seleccionar DWG 2007. abra el archivo exportado y péguelo en un archivo en blanco en Autodesk Civil 3D.</a:t>
+            </a:r>
           </a:p>
         </p:txBody>
       </p:sp>
@@ -5983,19 +5975,8 @@
                 <a:latin typeface="Segoe UI Light" panose="020B0502040204020203" pitchFamily="34" charset="0"/>
                 <a:cs typeface="Segoe UI Light" panose="020B0502040204020203" pitchFamily="34" charset="0"/>
               </a:rPr>
-              <a:t>Actividad 1: Exportar drenajes naturales de ArcMap a </a:t>
-            </a:r>
-            <a:r>
-              <a:rPr lang="es-CO" sz="800" dirty="0" err="1">
-                <a:latin typeface="Segoe UI Light" panose="020B0502040204020203" pitchFamily="34" charset="0"/>
-                <a:cs typeface="Segoe UI Light" panose="020B0502040204020203" pitchFamily="34" charset="0"/>
-              </a:rPr>
-              <a:t>Autocad</a:t>
-            </a:r>
-            <a:endParaRPr lang="es-CO" sz="800" dirty="0">
-              <a:latin typeface="Segoe UI Light" panose="020B0502040204020203" pitchFamily="34" charset="0"/>
-              <a:cs typeface="Segoe UI Light" panose="020B0502040204020203" pitchFamily="34" charset="0"/>
-            </a:endParaRPr>
+              <a:t>Actividad 1: Exportar drenajes naturales de ArcMap a AutoCAD</a:t>
+            </a:r>
           </a:p>
         </p:txBody>
       </p:sp>
@@ -6037,8 +6018,8 @@
         </p:nvSpPr>
         <p:spPr>
           <a:xfrm>
-            <a:off x="4529826" y="3105834"/>
-            <a:ext cx="3132348" cy="646331"/>
+            <a:off x="4340805" y="3105834"/>
+            <a:ext cx="3510390" cy="646331"/>
           </a:xfrm>
           <a:prstGeom prst="rect">
             <a:avLst/>
@@ -6057,7 +6038,7 @@
                 <a:latin typeface="Segoe UI Light" panose="020B0502040204020203" pitchFamily="34" charset="0"/>
                 <a:cs typeface="Segoe UI Light" panose="020B0502040204020203" pitchFamily="34" charset="0"/>
               </a:rPr>
-              <a:t>Actividad 2: Trazado del eje del valle usando Civil 3D</a:t>
+              <a:t>Actividad 2: Trazado del eje del valle usando Autodesk Civil 3D</a:t>
             </a:r>
           </a:p>
         </p:txBody>

--- a/activity/M02A02/M02A02.pptx
+++ b/activity/M02A02/M02A02.pptx
@@ -1123,7 +1123,7 @@
             <a:fld id="{53CE91DE-ABC6-4D22-89A0-1765B629FB43}" type="datetimeFigureOut">
               <a:rPr lang="es-CO" smtClean="0"/>
               <a:pPr/>
-              <a:t>29/07/2025</a:t>
+              <a:t>30/07/2025</a:t>
             </a:fld>
             <a:endParaRPr lang="es-CO"/>
           </a:p>
@@ -1576,7 +1576,7 @@
             <a:fld id="{43DF08CB-A55A-40B1-AEFD-F19B3CFD19B5}" type="datetimeFigureOut">
               <a:rPr lang="es-CO" smtClean="0"/>
               <a:pPr/>
-              <a:t>29/07/2025</a:t>
+              <a:t>30/07/2025</a:t>
             </a:fld>
             <a:endParaRPr lang="es-CO"/>
           </a:p>
@@ -1743,7 +1743,7 @@
             <a:fld id="{43DF08CB-A55A-40B1-AEFD-F19B3CFD19B5}" type="datetimeFigureOut">
               <a:rPr lang="es-CO" smtClean="0"/>
               <a:pPr/>
-              <a:t>29/07/2025</a:t>
+              <a:t>30/07/2025</a:t>
             </a:fld>
             <a:endParaRPr lang="es-CO"/>
           </a:p>
@@ -1920,7 +1920,7 @@
             <a:fld id="{43DF08CB-A55A-40B1-AEFD-F19B3CFD19B5}" type="datetimeFigureOut">
               <a:rPr lang="es-CO" smtClean="0"/>
               <a:pPr/>
-              <a:t>29/07/2025</a:t>
+              <a:t>30/07/2025</a:t>
             </a:fld>
             <a:endParaRPr lang="es-CO"/>
           </a:p>
@@ -2087,7 +2087,7 @@
             <a:fld id="{43DF08CB-A55A-40B1-AEFD-F19B3CFD19B5}" type="datetimeFigureOut">
               <a:rPr lang="es-CO" smtClean="0"/>
               <a:pPr/>
-              <a:t>29/07/2025</a:t>
+              <a:t>30/07/2025</a:t>
             </a:fld>
             <a:endParaRPr lang="es-CO"/>
           </a:p>
@@ -2330,7 +2330,7 @@
             <a:fld id="{43DF08CB-A55A-40B1-AEFD-F19B3CFD19B5}" type="datetimeFigureOut">
               <a:rPr lang="es-CO" smtClean="0"/>
               <a:pPr/>
-              <a:t>29/07/2025</a:t>
+              <a:t>30/07/2025</a:t>
             </a:fld>
             <a:endParaRPr lang="es-CO"/>
           </a:p>
@@ -2615,7 +2615,7 @@
             <a:fld id="{43DF08CB-A55A-40B1-AEFD-F19B3CFD19B5}" type="datetimeFigureOut">
               <a:rPr lang="es-CO" smtClean="0"/>
               <a:pPr/>
-              <a:t>29/07/2025</a:t>
+              <a:t>30/07/2025</a:t>
             </a:fld>
             <a:endParaRPr lang="es-CO"/>
           </a:p>
@@ -3034,7 +3034,7 @@
             <a:fld id="{43DF08CB-A55A-40B1-AEFD-F19B3CFD19B5}" type="datetimeFigureOut">
               <a:rPr lang="es-CO" smtClean="0"/>
               <a:pPr/>
-              <a:t>29/07/2025</a:t>
+              <a:t>30/07/2025</a:t>
             </a:fld>
             <a:endParaRPr lang="es-CO"/>
           </a:p>
@@ -3149,7 +3149,7 @@
             <a:fld id="{43DF08CB-A55A-40B1-AEFD-F19B3CFD19B5}" type="datetimeFigureOut">
               <a:rPr lang="es-CO" smtClean="0"/>
               <a:pPr/>
-              <a:t>29/07/2025</a:t>
+              <a:t>30/07/2025</a:t>
             </a:fld>
             <a:endParaRPr lang="es-CO"/>
           </a:p>
@@ -3241,7 +3241,7 @@
             <a:fld id="{43DF08CB-A55A-40B1-AEFD-F19B3CFD19B5}" type="datetimeFigureOut">
               <a:rPr lang="es-CO" smtClean="0"/>
               <a:pPr/>
-              <a:t>29/07/2025</a:t>
+              <a:t>30/07/2025</a:t>
             </a:fld>
             <a:endParaRPr lang="es-CO"/>
           </a:p>
@@ -3515,7 +3515,7 @@
             <a:fld id="{43DF08CB-A55A-40B1-AEFD-F19B3CFD19B5}" type="datetimeFigureOut">
               <a:rPr lang="es-CO" smtClean="0"/>
               <a:pPr/>
-              <a:t>29/07/2025</a:t>
+              <a:t>30/07/2025</a:t>
             </a:fld>
             <a:endParaRPr lang="es-CO"/>
           </a:p>
@@ -3765,7 +3765,7 @@
             <a:fld id="{43DF08CB-A55A-40B1-AEFD-F19B3CFD19B5}" type="datetimeFigureOut">
               <a:rPr lang="es-CO" smtClean="0"/>
               <a:pPr/>
-              <a:t>29/07/2025</a:t>
+              <a:t>30/07/2025</a:t>
             </a:fld>
             <a:endParaRPr lang="es-CO"/>
           </a:p>
@@ -3978,7 +3978,7 @@
             <a:fld id="{43DF08CB-A55A-40B1-AEFD-F19B3CFD19B5}" type="datetimeFigureOut">
               <a:rPr lang="es-CO" smtClean="0"/>
               <a:pPr/>
-              <a:t>29/07/2025</a:t>
+              <a:t>30/07/2025</a:t>
             </a:fld>
             <a:endParaRPr lang="es-CO"/>
           </a:p>
@@ -4696,7 +4696,7 @@
                 <a:latin typeface="Segoe UI Light" panose="020B0502040204020203" pitchFamily="34" charset="0"/>
                 <a:cs typeface="Segoe UI Light" panose="020B0502040204020203" pitchFamily="34" charset="0"/>
               </a:rPr>
-              <a:t>, tener en cuenta el ancho disponible para el valle y hacer un eje auxiliar a  ambos lados. Realizar el mismo procedimiento para los ejes de talud para el valle teniendo en cuenta la sección de diseño. </a:t>
+              <a:t>, tener en cuenta el ancho disponible para el valle y hacer un eje auxiliar a ambos lados. Realizar el mismo procedimiento para los ejes de talud para el valle teniendo en cuenta la sección de diseño. </a:t>
             </a:r>
             <a:endParaRPr lang="es-CO" sz="1200" dirty="0">
               <a:latin typeface="Segoe UI Light" panose="020B0502040204020203" pitchFamily="34" charset="0"/>
@@ -5833,7 +5833,49 @@
                 <a:latin typeface="Segoe UI Light" panose="020B0502040204020203" pitchFamily="34" charset="0"/>
                 <a:cs typeface="Segoe UI Light" panose="020B0502040204020203" pitchFamily="34" charset="0"/>
               </a:rPr>
-              <a:t>, luego expórtela a formato CAD, guardar el archivo con el mismo nombre de la capa de origen, Seleccionar DWG 2007. abra el archivo exportado y péguelo en un archivo en blanco en Autodesk Civil 3D.</a:t>
+              <a:t>, luego expórtela a formato CAD, guardar el archivo como </a:t>
+            </a:r>
+            <a:r>
+              <a:rPr lang="es-CO" sz="1600" i="1" dirty="0">
+                <a:latin typeface="Segoe UI Light" panose="020B0502040204020203" pitchFamily="34" charset="0"/>
+                <a:cs typeface="Segoe UI Light" panose="020B0502040204020203" pitchFamily="34" charset="0"/>
+              </a:rPr>
+              <a:t>/file/</a:t>
+            </a:r>
+            <a:r>
+              <a:rPr lang="es-CO" sz="1600" i="1" dirty="0" err="1">
+                <a:latin typeface="Segoe UI Light" panose="020B0502040204020203" pitchFamily="34" charset="0"/>
+                <a:cs typeface="Segoe UI Light" panose="020B0502040204020203" pitchFamily="34" charset="0"/>
+              </a:rPr>
+              <a:t>cad</a:t>
+            </a:r>
+            <a:r>
+              <a:rPr lang="es-CO" sz="1600" i="1" dirty="0">
+                <a:latin typeface="Segoe UI Light" panose="020B0502040204020203" pitchFamily="34" charset="0"/>
+                <a:cs typeface="Segoe UI Light" panose="020B0502040204020203" pitchFamily="34" charset="0"/>
+              </a:rPr>
+              <a:t>/</a:t>
+            </a:r>
+            <a:r>
+              <a:rPr lang="es-CO" sz="1600" i="1" dirty="0" err="1">
+                <a:latin typeface="Segoe UI Light" panose="020B0502040204020203" pitchFamily="34" charset="0"/>
+                <a:cs typeface="Segoe UI Light" panose="020B0502040204020203" pitchFamily="34" charset="0"/>
+              </a:rPr>
+              <a:t>acad</a:t>
+            </a:r>
+            <a:r>
+              <a:rPr lang="es-CO" sz="1600" i="1" dirty="0">
+                <a:latin typeface="Segoe UI Light" panose="020B0502040204020203" pitchFamily="34" charset="0"/>
+                <a:cs typeface="Segoe UI Light" panose="020B0502040204020203" pitchFamily="34" charset="0"/>
+              </a:rPr>
+              <a:t>/CGG_DrenajeNatural_v0.dxf</a:t>
+            </a:r>
+            <a:r>
+              <a:rPr lang="es-CO" sz="1600" dirty="0">
+                <a:latin typeface="Segoe UI Light" panose="020B0502040204020203" pitchFamily="34" charset="0"/>
+                <a:cs typeface="Segoe UI Light" panose="020B0502040204020203" pitchFamily="34" charset="0"/>
+              </a:rPr>
+              <a:t>, en ArcGIS seleccionar DWG 2007. </a:t>
             </a:r>
           </a:p>
         </p:txBody>
@@ -6117,8 +6159,8 @@
         </p:nvSpPr>
         <p:spPr>
           <a:xfrm>
-            <a:off x="695400" y="1536174"/>
-            <a:ext cx="4608512" cy="3785652"/>
+            <a:off x="527830" y="908720"/>
+            <a:ext cx="5136122" cy="5509200"/>
           </a:xfrm>
           <a:prstGeom prst="rect">
             <a:avLst/>
@@ -6131,13 +6173,15 @@
           </a:bodyPr>
           <a:lstStyle/>
           <a:p>
-            <a:pPr algn="just"/>
+            <a:pPr marL="342900" indent="-342900" algn="just">
+              <a:buAutoNum type="arabicPeriod"/>
+            </a:pPr>
             <a:r>
               <a:rPr lang="es-CO" sz="1600" dirty="0">
                 <a:latin typeface="Segoe UI Light" panose="020B0502040204020203" pitchFamily="34" charset="0"/>
                 <a:cs typeface="Segoe UI Light" panose="020B0502040204020203" pitchFamily="34" charset="0"/>
               </a:rPr>
-              <a:t>1. Crear archivo nuevo en blanco, verificar unidades usando pestaña </a:t>
+              <a:t>Crear archivo nuevo en blanco de Autodesk Civil 3D, verificar unidades usando pestaña </a:t>
             </a:r>
             <a:r>
               <a:rPr lang="es-CO" sz="1600" i="1" dirty="0" err="1">
@@ -6151,41 +6195,119 @@
                 <a:latin typeface="Segoe UI Light" panose="020B0502040204020203" pitchFamily="34" charset="0"/>
                 <a:cs typeface="Segoe UI Light" panose="020B0502040204020203" pitchFamily="34" charset="0"/>
               </a:rPr>
-              <a:t>.</a:t>
-            </a:r>
-          </a:p>
-          <a:p>
-            <a:pPr algn="just"/>
+              <a:t>. </a:t>
+            </a:r>
+            <a:r>
+              <a:rPr lang="es-CO" sz="1600" dirty="0">
+                <a:latin typeface="Segoe UI Light" panose="020B0502040204020203" pitchFamily="34" charset="0"/>
+                <a:cs typeface="Segoe UI Light" panose="020B0502040204020203" pitchFamily="34" charset="0"/>
+              </a:rPr>
+              <a:t>Guardar como /file/</a:t>
+            </a:r>
+            <a:r>
+              <a:rPr lang="es-CO" sz="1600" dirty="0" err="1">
+                <a:latin typeface="Segoe UI Light" panose="020B0502040204020203" pitchFamily="34" charset="0"/>
+                <a:cs typeface="Segoe UI Light" panose="020B0502040204020203" pitchFamily="34" charset="0"/>
+              </a:rPr>
+              <a:t>cad</a:t>
+            </a:r>
+            <a:r>
+              <a:rPr lang="es-CO" sz="1600" dirty="0">
+                <a:latin typeface="Segoe UI Light" panose="020B0502040204020203" pitchFamily="34" charset="0"/>
+                <a:cs typeface="Segoe UI Light" panose="020B0502040204020203" pitchFamily="34" charset="0"/>
+              </a:rPr>
+              <a:t>/civil/Civil3D_EjeValle_v0.</a:t>
+            </a:r>
+          </a:p>
+          <a:p>
+            <a:pPr marL="342900" indent="-342900" algn="just">
+              <a:buAutoNum type="arabicPeriod"/>
+            </a:pPr>
             <a:endParaRPr lang="es-CO" sz="1600" i="1" dirty="0">
               <a:latin typeface="Segoe UI Light" panose="020B0502040204020203" pitchFamily="34" charset="0"/>
               <a:cs typeface="Segoe UI Light" panose="020B0502040204020203" pitchFamily="34" charset="0"/>
             </a:endParaRPr>
           </a:p>
           <a:p>
-            <a:pPr algn="just"/>
+            <a:pPr marL="342900" indent="-342900" algn="just">
+              <a:buAutoNum type="arabicPeriod"/>
+            </a:pPr>
             <a:r>
               <a:rPr lang="es-CO" sz="1600" dirty="0">
                 <a:latin typeface="Segoe UI Light" panose="020B0502040204020203" pitchFamily="34" charset="0"/>
                 <a:cs typeface="Segoe UI Light" panose="020B0502040204020203" pitchFamily="34" charset="0"/>
               </a:rPr>
-              <a:t>2. Importar al espacio de trabajo, copiar y pegar, el eje recto propuesto para el Valle.</a:t>
-            </a:r>
-          </a:p>
-          <a:p>
-            <a:pPr algn="just"/>
+              <a:t>Abra el archivo exportado de drenajes, seleccione todos los objetos y péguelos con coordenadas en el archivo de Autodesk Civil 3D.</a:t>
+            </a:r>
+          </a:p>
+          <a:p>
+            <a:pPr marL="342900" indent="-342900" algn="just">
+              <a:buAutoNum type="arabicPeriod"/>
+            </a:pPr>
             <a:endParaRPr lang="es-CO" sz="1600" dirty="0">
               <a:latin typeface="Segoe UI Light" panose="020B0502040204020203" pitchFamily="34" charset="0"/>
               <a:cs typeface="Segoe UI Light" panose="020B0502040204020203" pitchFamily="34" charset="0"/>
             </a:endParaRPr>
           </a:p>
           <a:p>
-            <a:pPr algn="just"/>
+            <a:pPr marL="342900" indent="-342900">
+              <a:buAutoNum type="arabicPeriod"/>
+            </a:pPr>
             <a:r>
               <a:rPr lang="es-CO" sz="1600" dirty="0">
                 <a:latin typeface="Segoe UI Light" panose="020B0502040204020203" pitchFamily="34" charset="0"/>
                 <a:cs typeface="Segoe UI Light" panose="020B0502040204020203" pitchFamily="34" charset="0"/>
               </a:rPr>
-              <a:t>3. crear un alineamiento con la opción dibujar alineamiento: </a:t>
+              <a:t>Importar al espacio de trabajo (copiar y pegar con coordenadas), el eje recto propuesto para el valle contenido en el archivo /file/</a:t>
+            </a:r>
+            <a:r>
+              <a:rPr lang="es-CO" sz="1600" dirty="0" err="1">
+                <a:latin typeface="Segoe UI Light" panose="020B0502040204020203" pitchFamily="34" charset="0"/>
+                <a:cs typeface="Segoe UI Light" panose="020B0502040204020203" pitchFamily="34" charset="0"/>
+              </a:rPr>
+              <a:t>cad</a:t>
+            </a:r>
+            <a:r>
+              <a:rPr lang="es-CO" sz="1600" dirty="0">
+                <a:latin typeface="Segoe UI Light" panose="020B0502040204020203" pitchFamily="34" charset="0"/>
+                <a:cs typeface="Segoe UI Light" panose="020B0502040204020203" pitchFamily="34" charset="0"/>
+              </a:rPr>
+              <a:t>/</a:t>
+            </a:r>
+            <a:r>
+              <a:rPr lang="es-CO" sz="1600" dirty="0" err="1">
+                <a:latin typeface="Segoe UI Light" panose="020B0502040204020203" pitchFamily="34" charset="0"/>
+                <a:cs typeface="Segoe UI Light" panose="020B0502040204020203" pitchFamily="34" charset="0"/>
+              </a:rPr>
+              <a:t>acad</a:t>
+            </a:r>
+            <a:r>
+              <a:rPr lang="es-CO" sz="1600" dirty="0">
+                <a:latin typeface="Segoe UI Light" panose="020B0502040204020203" pitchFamily="34" charset="0"/>
+                <a:cs typeface="Segoe UI Light" panose="020B0502040204020203" pitchFamily="34" charset="0"/>
+              </a:rPr>
+              <a:t>/ RD_EjeValleNodo_v1.dwg.</a:t>
+            </a:r>
+          </a:p>
+          <a:p>
+            <a:pPr marL="342900" indent="-342900">
+              <a:buAutoNum type="arabicPeriod"/>
+            </a:pPr>
+            <a:endParaRPr lang="es-CO" sz="1600" dirty="0">
+              <a:latin typeface="Segoe UI Light" panose="020B0502040204020203" pitchFamily="34" charset="0"/>
+              <a:cs typeface="Segoe UI Light" panose="020B0502040204020203" pitchFamily="34" charset="0"/>
+            </a:endParaRPr>
+          </a:p>
+          <a:p>
+            <a:pPr marL="342900" indent="-342900">
+              <a:buAutoNum type="arabicPeriod"/>
+            </a:pPr>
+            <a:r>
+              <a:rPr lang="es-CO" sz="1600" dirty="0">
+                <a:latin typeface="Segoe UI Light" panose="020B0502040204020203" pitchFamily="34" charset="0"/>
+                <a:cs typeface="Segoe UI Light" panose="020B0502040204020203" pitchFamily="34" charset="0"/>
+              </a:rPr>
+              <a:t>Crear un alineamiento con la opción dibujar alineamiento: </a:t>
             </a:r>
             <a:r>
               <a:rPr lang="es-CO" sz="1600" i="1" dirty="0">
@@ -6262,59 +6384,49 @@
                 <a:latin typeface="Segoe UI Light" panose="020B0502040204020203" pitchFamily="34" charset="0"/>
                 <a:cs typeface="Segoe UI Light" panose="020B0502040204020203" pitchFamily="34" charset="0"/>
               </a:rPr>
-              <a:t> </a:t>
-            </a:r>
-            <a:r>
-              <a:rPr lang="es-CO" sz="1600" i="1" dirty="0" err="1">
+              <a:t> tolos,</a:t>
+            </a:r>
+            <a:r>
+              <a:rPr lang="es-CO" sz="1600" dirty="0">
                 <a:latin typeface="Segoe UI Light" panose="020B0502040204020203" pitchFamily="34" charset="0"/>
                 <a:cs typeface="Segoe UI Light" panose="020B0502040204020203" pitchFamily="34" charset="0"/>
               </a:rPr>
-              <a:t>tools</a:t>
+              <a:t> definir el nombre de eje como</a:t>
             </a:r>
             <a:r>
               <a:rPr lang="es-CO" sz="1600" i="1" dirty="0">
                 <a:latin typeface="Segoe UI Light" panose="020B0502040204020203" pitchFamily="34" charset="0"/>
                 <a:cs typeface="Segoe UI Light" panose="020B0502040204020203" pitchFamily="34" charset="0"/>
               </a:rPr>
-              <a:t> definir el nombre de eje como </a:t>
-            </a:r>
-            <a:r>
-              <a:rPr lang="es-CO" sz="1600" i="1" dirty="0" err="1">
-                <a:latin typeface="Segoe UI Light" panose="020B0502040204020203" pitchFamily="34" charset="0"/>
-                <a:cs typeface="Segoe UI Light" panose="020B0502040204020203" pitchFamily="34" charset="0"/>
-              </a:rPr>
-              <a:t>EjeValle_v0</a:t>
-            </a:r>
-            <a:r>
-              <a:rPr lang="es-CO" sz="1600" i="1" dirty="0">
-                <a:latin typeface="Segoe UI Light" panose="020B0502040204020203" pitchFamily="34" charset="0"/>
-                <a:cs typeface="Segoe UI Light" panose="020B0502040204020203" pitchFamily="34" charset="0"/>
-              </a:rPr>
-              <a:t>.</a:t>
-            </a:r>
-          </a:p>
-          <a:p>
-            <a:pPr algn="just"/>
+              <a:t> EjeValle_v0.</a:t>
+            </a:r>
+          </a:p>
+          <a:p>
+            <a:pPr marL="342900" indent="-342900">
+              <a:buAutoNum type="arabicPeriod"/>
+            </a:pPr>
             <a:endParaRPr lang="es-CO" sz="1600" i="1" dirty="0">
               <a:latin typeface="Segoe UI Light" panose="020B0502040204020203" pitchFamily="34" charset="0"/>
               <a:cs typeface="Segoe UI Light" panose="020B0502040204020203" pitchFamily="34" charset="0"/>
             </a:endParaRPr>
           </a:p>
           <a:p>
-            <a:pPr algn="just"/>
+            <a:pPr marL="342900" indent="-342900">
+              <a:buAutoNum type="arabicPeriod"/>
+            </a:pPr>
             <a:r>
               <a:rPr lang="es-CO" sz="1600" dirty="0">
                 <a:latin typeface="Segoe UI Light" panose="020B0502040204020203" pitchFamily="34" charset="0"/>
                 <a:cs typeface="Segoe UI Light" panose="020B0502040204020203" pitchFamily="34" charset="0"/>
               </a:rPr>
-              <a:t>4. Ir a </a:t>
+              <a:t>Ir a </a:t>
             </a:r>
             <a:r>
               <a:rPr lang="es-CO" sz="1600" i="1" dirty="0" err="1">
                 <a:latin typeface="Segoe UI Light" panose="020B0502040204020203" pitchFamily="34" charset="0"/>
                 <a:cs typeface="Segoe UI Light" panose="020B0502040204020203" pitchFamily="34" charset="0"/>
               </a:rPr>
-              <a:t>alignment</a:t>
+              <a:t>Alignment</a:t>
             </a:r>
             <a:r>
               <a:rPr lang="es-CO" sz="1600" i="1" dirty="0">
@@ -6328,21 +6440,14 @@
                 <a:latin typeface="Segoe UI Light" panose="020B0502040204020203" pitchFamily="34" charset="0"/>
                 <a:cs typeface="Segoe UI Light" panose="020B0502040204020203" pitchFamily="34" charset="0"/>
               </a:rPr>
-              <a:t>layout</a:t>
+              <a:t>Layout</a:t>
             </a:r>
             <a:r>
               <a:rPr lang="es-CO" sz="1600" i="1" dirty="0">
                 <a:latin typeface="Segoe UI Light" panose="020B0502040204020203" pitchFamily="34" charset="0"/>
                 <a:cs typeface="Segoe UI Light" panose="020B0502040204020203" pitchFamily="34" charset="0"/>
               </a:rPr>
-              <a:t> </a:t>
-            </a:r>
-            <a:r>
-              <a:rPr lang="es-CO" sz="1600" i="1" dirty="0" err="1">
-                <a:latin typeface="Segoe UI Light" panose="020B0502040204020203" pitchFamily="34" charset="0"/>
-                <a:cs typeface="Segoe UI Light" panose="020B0502040204020203" pitchFamily="34" charset="0"/>
-              </a:rPr>
-              <a:t>tools</a:t>
+              <a:t> Tools</a:t>
             </a:r>
             <a:r>
               <a:rPr lang="es-CO" sz="1600" dirty="0">
@@ -6564,7 +6669,7 @@
                 <a:latin typeface="Segoe UI Light" panose="020B0502040204020203" pitchFamily="34" charset="0"/>
                 <a:cs typeface="Segoe UI Light" panose="020B0502040204020203" pitchFamily="34" charset="0"/>
               </a:rPr>
-              <a:t>5.  Seleccionar dibujar tangentes y curvas e iniciar el proceso de dibujo teniendo en cuenta la dirección del flujo y que los vértices del alineamiento recto correspondan con los vértices de las curvas, es decir, se debe dibujar el alineamiento sobre los vértices que definen la polilínea del alineamiento recto.</a:t>
+              <a:t>6.  Seleccionar dibujar tangentes y curvas e iniciar el proceso de dibujo teniendo en cuenta la dirección del flujo y que los vértices del alineamiento recto correspondan con los vértices de las curvas, es decir, se debe dibujar el alineamiento sobre los vértices que definen la polilínea del alineamiento recto.</a:t>
             </a:r>
             <a:endParaRPr lang="es-CO" sz="1200" dirty="0">
               <a:latin typeface="Segoe UI Light" panose="020B0502040204020203" pitchFamily="34" charset="0"/>
